--- a/HPO Stream Package Builder - Master Template.pptx
+++ b/HPO Stream Package Builder - Master Template.pptx
@@ -8202,6 +8202,221 @@
           </a:p>
         </p:txBody>
       </p:sp>
+      <p:sp>
+        <p:nvSpPr>
+          <p:cNvPr id="2" name="Text Placeholder 5">
+            <a:extLst>
+              <a:ext uri="{FF2B5EF4-FFF2-40B4-BE49-F238E27FC236}">
+                <a16:creationId xmlns:a16="http://schemas.microsoft.com/office/drawing/2014/main" id="{DB31403B-FC29-81FD-1DCC-70E1738E9F57}"/>
+              </a:ext>
+            </a:extLst>
+          </p:cNvPr>
+          <p:cNvSpPr txBox="1">
+            <a:spLocks/>
+          </p:cNvSpPr>
+          <p:nvPr/>
+        </p:nvSpPr>
+        <p:spPr>
+          <a:xfrm>
+            <a:off x="305402" y="2521070"/>
+            <a:ext cx="2469604" cy="413209"/>
+          </a:xfrm>
+          <a:prstGeom prst="roundRect">
+            <a:avLst>
+              <a:gd name="adj" fmla="val 19110"/>
+            </a:avLst>
+          </a:prstGeom>
+          <a:solidFill>
+            <a:schemeClr val="bg2"/>
+          </a:solidFill>
+          <a:ln w="19050" cap="flat" cmpd="sng" algn="ctr">
+            <a:gradFill flip="none" rotWithShape="1">
+              <a:gsLst>
+                <a:gs pos="0">
+                  <a:schemeClr val="accent1"/>
+                </a:gs>
+                <a:gs pos="100000">
+                  <a:schemeClr val="accent2"/>
+                </a:gs>
+              </a:gsLst>
+              <a:lin ang="0" scaled="1"/>
+              <a:tileRect/>
+            </a:gradFill>
+            <a:prstDash val="solid"/>
+            <a:miter lim="800000"/>
+          </a:ln>
+          <a:effectLst>
+            <a:outerShdw blurRad="288898" sx="102000" sy="102000" algn="ctr" rotWithShape="0">
+              <a:schemeClr val="accent1">
+                <a:alpha val="18227"/>
+              </a:schemeClr>
+            </a:outerShdw>
+          </a:effectLst>
+        </p:spPr>
+        <p:txBody>
+          <a:bodyPr vert="horz" lIns="274320" tIns="0" rIns="0" bIns="0" rtlCol="0" anchor="ctr">
+            <a:noAutofit/>
+          </a:bodyPr>
+          <a:lstStyle>
+            <a:defPPr>
+              <a:defRPr lang="en-US"/>
+            </a:defPPr>
+            <a:lvl1pPr indent="0">
+              <a:lnSpc>
+                <a:spcPct val="100000"/>
+              </a:lnSpc>
+              <a:spcBef>
+                <a:spcPts val="1000"/>
+              </a:spcBef>
+              <a:buFont typeface="Arial" panose="020B0604020202020204" pitchFamily="34" charset="0"/>
+              <a:buNone/>
+              <a:defRPr sz="1400" b="0" i="0"/>
+            </a:lvl1pPr>
+            <a:lvl2pPr marL="225425" indent="-214313">
+              <a:lnSpc>
+                <a:spcPct val="100000"/>
+              </a:lnSpc>
+              <a:spcBef>
+                <a:spcPts val="500"/>
+              </a:spcBef>
+              <a:buFont typeface="Arial" panose="020B0604020202020204" pitchFamily="34" charset="0"/>
+              <a:buChar char="•"/>
+              <a:tabLst/>
+              <a:defRPr sz="1600" b="0" i="0">
+                <a:solidFill>
+                  <a:schemeClr val="lt1"/>
+                </a:solidFill>
+              </a:defRPr>
+            </a:lvl2pPr>
+            <a:lvl3pPr marL="403225" indent="-177800">
+              <a:lnSpc>
+                <a:spcPct val="100000"/>
+              </a:lnSpc>
+              <a:spcBef>
+                <a:spcPts val="500"/>
+              </a:spcBef>
+              <a:buFont typeface="Arial" panose="020B0604020202020204" pitchFamily="34" charset="0"/>
+              <a:buChar char="•"/>
+              <a:tabLst/>
+              <a:defRPr sz="1400" b="0" i="0">
+                <a:solidFill>
+                  <a:schemeClr val="lt1"/>
+                </a:solidFill>
+              </a:defRPr>
+            </a:lvl3pPr>
+            <a:lvl4pPr marL="581025" indent="-177800">
+              <a:lnSpc>
+                <a:spcPct val="100000"/>
+              </a:lnSpc>
+              <a:spcBef>
+                <a:spcPts val="500"/>
+              </a:spcBef>
+              <a:buFont typeface="Arial" panose="020B0604020202020204" pitchFamily="34" charset="0"/>
+              <a:buChar char="•"/>
+              <a:tabLst/>
+              <a:defRPr sz="1200" b="0" i="0">
+                <a:solidFill>
+                  <a:schemeClr val="lt1"/>
+                </a:solidFill>
+              </a:defRPr>
+            </a:lvl4pPr>
+            <a:lvl5pPr marL="758825" indent="-177800">
+              <a:lnSpc>
+                <a:spcPct val="100000"/>
+              </a:lnSpc>
+              <a:spcBef>
+                <a:spcPts val="500"/>
+              </a:spcBef>
+              <a:buFont typeface="Arial" panose="020B0604020202020204" pitchFamily="34" charset="0"/>
+              <a:buChar char="•"/>
+              <a:tabLst/>
+              <a:defRPr sz="1200" b="0" i="0">
+                <a:solidFill>
+                  <a:schemeClr val="lt1"/>
+                </a:solidFill>
+              </a:defRPr>
+            </a:lvl5pPr>
+            <a:lvl6pPr marL="758825" indent="-177800">
+              <a:lnSpc>
+                <a:spcPct val="100000"/>
+              </a:lnSpc>
+              <a:spcBef>
+                <a:spcPts val="500"/>
+              </a:spcBef>
+              <a:buFont typeface="Arial" panose="020B0604020202020204" pitchFamily="34" charset="0"/>
+              <a:buChar char="•"/>
+              <a:tabLst/>
+              <a:defRPr sz="1400">
+                <a:solidFill>
+                  <a:schemeClr val="lt1"/>
+                </a:solidFill>
+              </a:defRPr>
+            </a:lvl6pPr>
+            <a:lvl7pPr marL="758825" indent="-177800">
+              <a:lnSpc>
+                <a:spcPct val="100000"/>
+              </a:lnSpc>
+              <a:spcBef>
+                <a:spcPts val="500"/>
+              </a:spcBef>
+              <a:buFont typeface="Arial" panose="020B0604020202020204" pitchFamily="34" charset="0"/>
+              <a:buChar char="•"/>
+              <a:tabLst/>
+              <a:defRPr sz="1400">
+                <a:solidFill>
+                  <a:schemeClr val="lt1"/>
+                </a:solidFill>
+              </a:defRPr>
+            </a:lvl7pPr>
+            <a:lvl8pPr marL="758825" indent="-177800">
+              <a:lnSpc>
+                <a:spcPct val="100000"/>
+              </a:lnSpc>
+              <a:spcBef>
+                <a:spcPts val="500"/>
+              </a:spcBef>
+              <a:buFont typeface="Arial" panose="020B0604020202020204" pitchFamily="34" charset="0"/>
+              <a:buChar char="•"/>
+              <a:tabLst/>
+              <a:defRPr sz="1400">
+                <a:solidFill>
+                  <a:schemeClr val="lt1"/>
+                </a:solidFill>
+              </a:defRPr>
+            </a:lvl8pPr>
+            <a:lvl9pPr marL="581025" indent="0">
+              <a:lnSpc>
+                <a:spcPct val="100000"/>
+              </a:lnSpc>
+              <a:spcBef>
+                <a:spcPts val="500"/>
+              </a:spcBef>
+              <a:buFont typeface="Arial" panose="020B0604020202020204" pitchFamily="34" charset="0"/>
+              <a:buNone/>
+              <a:tabLst/>
+              <a:defRPr sz="1400">
+                <a:solidFill>
+                  <a:schemeClr val="lt1"/>
+                </a:solidFill>
+              </a:defRPr>
+            </a:lvl9pPr>
+          </a:lstStyle>
+          <a:p>
+            <a:pPr lvl="0">
+              <a:defRPr/>
+            </a:pPr>
+            <a:r>
+              <a:rPr lang="en-US" b="1" dirty="0">
+                <a:solidFill>
+                  <a:srgbClr val="D5D5D5"/>
+                </a:solidFill>
+                <a:latin typeface="Spectrum Sans Bold" panose="02110004020202020204"/>
+              </a:rPr>
+              <a:t>[Client Name]</a:t>
+            </a:r>
+          </a:p>
+        </p:txBody>
+      </p:sp>
     </p:spTree>
     <p:extLst>
       <p:ext uri="{BB962C8B-B14F-4D97-AF65-F5344CB8AC3E}">
@@ -10219,44 +10434,6 @@
 </file>
 
 <file path=customXml/item2.xml><?xml version="1.0" encoding="utf-8"?>
-<?mso-contentType ?>
-<spe:Receivers xmlns:spe="http://schemas.microsoft.com/sharepoint/events"/>
-</file>
-
-<file path=customXml/item3.xml><?xml version="1.0" encoding="utf-8"?>
-<p:properties xmlns:p="http://schemas.microsoft.com/office/2006/metadata/properties" xmlns:xsi="http://www.w3.org/2001/XMLSchema-instance" xmlns:pc="http://schemas.microsoft.com/office/infopath/2007/PartnerControls">
-  <documentManagement>
-    <TaxCatchAll xmlns="a0547eee-aaa8-4b90-a1b8-3c540830c94d" xsi:nil="true"/>
-    <j54b65ba43ff43c48723fc8adc29d268 xmlns="a0547eee-aaa8-4b90-a1b8-3c540830c94d">
-      <Terms xmlns="http://schemas.microsoft.com/office/infopath/2007/PartnerControls"/>
-    </j54b65ba43ff43c48723fc8adc29d268>
-    <l420c45215364e2eb38c14ab041199ab xmlns="a0547eee-aaa8-4b90-a1b8-3c540830c94d">
-      <Terms xmlns="http://schemas.microsoft.com/office/infopath/2007/PartnerControls"/>
-    </l420c45215364e2eb38c14ab041199ab>
-    <la4ae81035174b1fba751a07ca4d086b xmlns="a0547eee-aaa8-4b90-a1b8-3c540830c94d">
-      <Terms xmlns="http://schemas.microsoft.com/office/infopath/2007/PartnerControls"/>
-    </la4ae81035174b1fba751a07ca4d086b>
-    <_dlc_DocIdPersistId xmlns="a0547eee-aaa8-4b90-a1b8-3c540830c94d" xsi:nil="true"/>
-    <SROwner xmlns="a0547eee-aaa8-4b90-a1b8-3c540830c94d">
-      <UserInfo>
-        <DisplayName/>
-        <AccountId xsi:nil="true"/>
-        <AccountType/>
-      </UserInfo>
-    </SROwner>
-    <SRRenewal xmlns="a0547eee-aaa8-4b90-a1b8-3c540830c94d" xsi:nil="true"/>
-    <j7c24873d3bf4df793fceec9ac332839 xmlns="a0547eee-aaa8-4b90-a1b8-3c540830c94d">
-      <Terms xmlns="http://schemas.microsoft.com/office/infopath/2007/PartnerControls"/>
-    </j7c24873d3bf4df793fceec9ac332839>
-    <SRThumbnail xmlns="a0547eee-aaa8-4b90-a1b8-3c540830c94d">
-      <Url xsi:nil="true"/>
-      <Description xsi:nil="true"/>
-    </SRThumbnail>
-  </documentManagement>
-</p:properties>
-</file>
-
-<file path=customXml/item4.xml><?xml version="1.0" encoding="utf-8"?>
 <ct:contentTypeSchema xmlns:ct="http://schemas.microsoft.com/office/2006/metadata/contentType" xmlns:ma="http://schemas.microsoft.com/office/2006/metadata/properties/metaAttributes" ct:_="" ma:_="" ma:contentTypeName="SR Document" ma:contentTypeID="0x0101004498840A4C114E46B8C4ECA211F55C5E00E2F44E5BC511894F8C93D74DA4B18249" ma:contentTypeVersion="44" ma:contentTypeDescription="" ma:contentTypeScope="" ma:versionID="fd16523f0abdae274e19cd71c6bde544">
   <xsd:schema xmlns:xsd="http://www.w3.org/2001/XMLSchema" xmlns:xs="http://www.w3.org/2001/XMLSchema" xmlns:p="http://schemas.microsoft.com/office/2006/metadata/properties" xmlns:ns2="a0547eee-aaa8-4b90-a1b8-3c540830c94d" xmlns:ns3="d9991e3c-4de5-4956-8de4-c71c59ac3722" targetNamespace="http://schemas.microsoft.com/office/2006/metadata/properties" ma:root="true" ma:fieldsID="134456c98559cfd421d305b01f0f49fc" ns2:_="" ns3:_="">
     <xsd:import namespace="a0547eee-aaa8-4b90-a1b8-3c540830c94d"/>
@@ -10527,6 +10704,44 @@
 </ct:contentTypeSchema>
 </file>
 
+<file path=customXml/item3.xml><?xml version="1.0" encoding="utf-8"?>
+<p:properties xmlns:p="http://schemas.microsoft.com/office/2006/metadata/properties" xmlns:xsi="http://www.w3.org/2001/XMLSchema-instance" xmlns:pc="http://schemas.microsoft.com/office/infopath/2007/PartnerControls">
+  <documentManagement>
+    <TaxCatchAll xmlns="a0547eee-aaa8-4b90-a1b8-3c540830c94d" xsi:nil="true"/>
+    <j54b65ba43ff43c48723fc8adc29d268 xmlns="a0547eee-aaa8-4b90-a1b8-3c540830c94d">
+      <Terms xmlns="http://schemas.microsoft.com/office/infopath/2007/PartnerControls"/>
+    </j54b65ba43ff43c48723fc8adc29d268>
+    <l420c45215364e2eb38c14ab041199ab xmlns="a0547eee-aaa8-4b90-a1b8-3c540830c94d">
+      <Terms xmlns="http://schemas.microsoft.com/office/infopath/2007/PartnerControls"/>
+    </l420c45215364e2eb38c14ab041199ab>
+    <la4ae81035174b1fba751a07ca4d086b xmlns="a0547eee-aaa8-4b90-a1b8-3c540830c94d">
+      <Terms xmlns="http://schemas.microsoft.com/office/infopath/2007/PartnerControls"/>
+    </la4ae81035174b1fba751a07ca4d086b>
+    <_dlc_DocIdPersistId xmlns="a0547eee-aaa8-4b90-a1b8-3c540830c94d" xsi:nil="true"/>
+    <SROwner xmlns="a0547eee-aaa8-4b90-a1b8-3c540830c94d">
+      <UserInfo>
+        <DisplayName/>
+        <AccountId xsi:nil="true"/>
+        <AccountType/>
+      </UserInfo>
+    </SROwner>
+    <SRRenewal xmlns="a0547eee-aaa8-4b90-a1b8-3c540830c94d" xsi:nil="true"/>
+    <j7c24873d3bf4df793fceec9ac332839 xmlns="a0547eee-aaa8-4b90-a1b8-3c540830c94d">
+      <Terms xmlns="http://schemas.microsoft.com/office/infopath/2007/PartnerControls"/>
+    </j7c24873d3bf4df793fceec9ac332839>
+    <SRThumbnail xmlns="a0547eee-aaa8-4b90-a1b8-3c540830c94d">
+      <Url xsi:nil="true"/>
+      <Description xsi:nil="true"/>
+    </SRThumbnail>
+  </documentManagement>
+</p:properties>
+</file>
+
+<file path=customXml/item4.xml><?xml version="1.0" encoding="utf-8"?>
+<?mso-contentType ?>
+<spe:Receivers xmlns:spe="http://schemas.microsoft.com/sharepoint/events"/>
+</file>
+
 <file path=customXml/itemProps1.xml><?xml version="1.0" encoding="utf-8"?>
 <ds:datastoreItem xmlns:ds="http://schemas.openxmlformats.org/officeDocument/2006/customXml" ds:itemID="{EC52D6D2-615C-42E8-A3C5-D765C3285355}">
   <ds:schemaRefs>
@@ -10536,9 +10751,20 @@
 </file>
 
 <file path=customXml/itemProps2.xml><?xml version="1.0" encoding="utf-8"?>
-<ds:datastoreItem xmlns:ds="http://schemas.openxmlformats.org/officeDocument/2006/customXml" ds:itemID="{020E764C-296D-40F1-B4A5-CAEC833EF05C}">
+<ds:datastoreItem xmlns:ds="http://schemas.openxmlformats.org/officeDocument/2006/customXml" ds:itemID="{12B3C130-8141-496F-8BE5-9CF1D14628D4}">
   <ds:schemaRefs>
-    <ds:schemaRef ds:uri="http://schemas.microsoft.com/sharepoint/events"/>
+    <ds:schemaRef ds:uri="http://schemas.microsoft.com/office/2006/metadata/contentType"/>
+    <ds:schemaRef ds:uri="http://schemas.microsoft.com/office/2006/metadata/properties/metaAttributes"/>
+    <ds:schemaRef ds:uri="http://www.w3.org/2001/XMLSchema"/>
+    <ds:schemaRef ds:uri="http://schemas.microsoft.com/office/2006/metadata/properties"/>
+    <ds:schemaRef ds:uri="a0547eee-aaa8-4b90-a1b8-3c540830c94d"/>
+    <ds:schemaRef ds:uri="d9991e3c-4de5-4956-8de4-c71c59ac3722"/>
+    <ds:schemaRef ds:uri="http://schemas.microsoft.com/office/2006/documentManagement/types"/>
+    <ds:schemaRef ds:uri="http://schemas.microsoft.com/office/infopath/2007/PartnerControls"/>
+    <ds:schemaRef ds:uri="http://schemas.openxmlformats.org/package/2006/metadata/core-properties"/>
+    <ds:schemaRef ds:uri="http://purl.org/dc/elements/1.1/"/>
+    <ds:schemaRef ds:uri="http://purl.org/dc/terms/"/>
+    <ds:schemaRef ds:uri="http://schemas.microsoft.com/internal/obd"/>
   </ds:schemaRefs>
 </ds:datastoreItem>
 </file>
@@ -10562,20 +10788,9 @@
 </file>
 
 <file path=customXml/itemProps4.xml><?xml version="1.0" encoding="utf-8"?>
-<ds:datastoreItem xmlns:ds="http://schemas.openxmlformats.org/officeDocument/2006/customXml" ds:itemID="{12B3C130-8141-496F-8BE5-9CF1D14628D4}">
+<ds:datastoreItem xmlns:ds="http://schemas.openxmlformats.org/officeDocument/2006/customXml" ds:itemID="{020E764C-296D-40F1-B4A5-CAEC833EF05C}">
   <ds:schemaRefs>
-    <ds:schemaRef ds:uri="http://schemas.microsoft.com/office/2006/metadata/contentType"/>
-    <ds:schemaRef ds:uri="http://schemas.microsoft.com/office/2006/metadata/properties/metaAttributes"/>
-    <ds:schemaRef ds:uri="http://www.w3.org/2001/XMLSchema"/>
-    <ds:schemaRef ds:uri="http://schemas.microsoft.com/office/2006/metadata/properties"/>
-    <ds:schemaRef ds:uri="a0547eee-aaa8-4b90-a1b8-3c540830c94d"/>
-    <ds:schemaRef ds:uri="d9991e3c-4de5-4956-8de4-c71c59ac3722"/>
-    <ds:schemaRef ds:uri="http://schemas.microsoft.com/office/2006/documentManagement/types"/>
-    <ds:schemaRef ds:uri="http://schemas.microsoft.com/office/infopath/2007/PartnerControls"/>
-    <ds:schemaRef ds:uri="http://schemas.openxmlformats.org/package/2006/metadata/core-properties"/>
-    <ds:schemaRef ds:uri="http://purl.org/dc/elements/1.1/"/>
-    <ds:schemaRef ds:uri="http://purl.org/dc/terms/"/>
-    <ds:schemaRef ds:uri="http://schemas.microsoft.com/internal/obd"/>
+    <ds:schemaRef ds:uri="http://schemas.microsoft.com/sharepoint/events"/>
   </ds:schemaRefs>
 </ds:datastoreItem>
 </file>
